--- a/materials/Week5_教學簡報.pptx
+++ b/materials/Week5_教學簡報.pptx
@@ -10080,7 +10080,7 @@
                 <a:ea typeface="PingFang TC"/>
                 <a:cs typeface="PingFang TC"/>
               </a:rPr>
-              <a:t>在比較頁最上面；上課日 13:30–18:00 內存檔才算課中，之後補答算課後</a:t>
+              <a:t>在比較頁最上面；上課日 13:00–17:00 內存檔才算課中，之後補答算課後</a:t>
             </a:r>
           </a:p>
         </p:txBody>

--- a/materials/Week5_教學簡報.pptx
+++ b/materials/Week5_教學簡報.pptx
@@ -16947,7 +16947,7 @@
                 <a:ea typeface="PingFang TC"/>
                 <a:cs typeface="PingFang TC"/>
               </a:rPr>
-              <a:t>接下來三週</a:t>
+              <a:t>接下來</a:t>
             </a:r>
           </a:p>
         </p:txBody>
@@ -17005,7 +17005,7 @@
                 <a:ea typeface="PingFang TC"/>
                 <a:cs typeface="PingFang TC"/>
               </a:rPr>
-              <a:t>期中之前還有兩堂課，期中就是你這兩週的東西</a:t>
+              <a:t>今天後半場先看 AI 新創地圖；期中就是你 Week 4、5 的東西</a:t>
             </a:r>
           </a:p>
         </p:txBody>
@@ -17309,7 +17309,7 @@
                 <a:ea typeface="PingFang TC"/>
                 <a:cs typeface="PingFang TC"/>
               </a:rPr>
-              <a:t>Week 6（11/6）</a:t>
+              <a:t>今天後半場（約 60 分鐘）</a:t>
             </a:r>
           </a:p>
         </p:txBody>
@@ -17367,7 +17367,7 @@
                 <a:ea typeface="PingFang TC"/>
                 <a:cs typeface="PingFang TC"/>
               </a:rPr>
-              <a:t>AI 新創現況：現在誰在做什麼、錢往哪流、台灣在哪裡。老師講；課堂兩題；PDF 上傳功能上線。</a:t>
+              <a:t>AI 新創地圖：錢往哪流、4 大區、10 座島。老師講；PDF 上傳功能上線。</a:t>
             </a:r>
           </a:p>
         </p:txBody>
